--- a/system-design-101/vi/lessons/sd-06-020/slides/sd-06-020.pptx
+++ b/system-design-101/vi/lessons/sd-06-020/slides/sd-06-020.pptx
@@ -12284,7 +12284,7 @@
               <a:t> sách</a:t>
             </a:r>
             <a:r>
-              <a:rPr lang="en-US" sz="2850" dirty="0" spc="-7" kern="0">
+              <a:rPr lang="en-US" sz="2850" dirty="0" spc="11" kern="0">
                 <a:solidFill>
                   <a:srgbClr val="14161C"/>
                 </a:solidFill>
@@ -12292,10 +12292,10 @@
                 <a:ea typeface="Be Vietnam Pro SemiBold" pitchFamily="34" charset="-122"/>
                 <a:cs typeface="Be Vietnam Pro SemiBold" pitchFamily="34" charset="-120"/>
               </a:rPr>
-              <a:t> không</a:t>
-            </a:r>
-            <a:r>
-              <a:rPr lang="en-US" sz="2850" dirty="0" spc="3" kern="0">
+              <a:t> đơn</a:t>
+            </a:r>
+            <a:r>
+              <a:rPr lang="en-US" sz="2850" dirty="0" spc="2" kern="0">
                 <a:solidFill>
                   <a:srgbClr val="14161C"/>
                 </a:solidFill>
@@ -12303,10 +12303,10 @@
                 <a:ea typeface="Be Vietnam Pro SemiBold" pitchFamily="34" charset="-122"/>
                 <a:cs typeface="Be Vietnam Pro SemiBold" pitchFamily="34" charset="-120"/>
               </a:rPr>
-              <a:t> giữ</a:t>
-            </a:r>
-            <a:r>
-              <a:rPr lang="en-US" sz="2850" dirty="0" spc="0" kern="0">
+              <a:t> giản</a:t>
+            </a:r>
+            <a:r>
+              <a:rPr lang="en-US" sz="2850" dirty="0" spc="-6" kern="0">
                 <a:solidFill>
                   <a:srgbClr val="14161C"/>
                 </a:solidFill>
@@ -12314,10 +12314,10 @@
                 <a:ea typeface="Be Vietnam Pro SemiBold" pitchFamily="34" charset="-122"/>
                 <a:cs typeface="Be Vietnam Pro SemiBold" pitchFamily="34" charset="-120"/>
               </a:rPr>
-              <a:t> việc</a:t>
-            </a:r>
-            <a:r>
-              <a:rPr lang="en-US" sz="2850" dirty="0" spc="1" kern="0">
+              <a:t> không</a:t>
+            </a:r>
+            <a:r>
+              <a:rPr lang="en-US" sz="2850" dirty="0" spc="3" kern="0">
                 <a:solidFill>
                   <a:srgbClr val="14161C"/>
                 </a:solidFill>
@@ -12325,10 +12325,10 @@
                 <a:ea typeface="Be Vietnam Pro SemiBold" pitchFamily="34" charset="-122"/>
                 <a:cs typeface="Be Vietnam Pro SemiBold" pitchFamily="34" charset="-120"/>
               </a:rPr>
-              <a:t> khi</a:t>
-            </a:r>
-            <a:r>
-              <a:rPr lang="en-US" sz="2850" dirty="0" spc="9" kern="0">
+              <a:t> tự</a:t>
+            </a:r>
+            <a:r>
+              <a:rPr lang="en-US" sz="2850" dirty="0" spc="2" kern="0">
                 <a:solidFill>
                   <a:srgbClr val="14161C"/>
                 </a:solidFill>
@@ -12336,10 +12336,10 @@
                 <a:ea typeface="Be Vietnam Pro SemiBold" pitchFamily="34" charset="-122"/>
                 <a:cs typeface="Be Vietnam Pro SemiBold" pitchFamily="34" charset="-120"/>
               </a:rPr>
-              <a:t> người</a:t>
-            </a:r>
-            <a:r>
-              <a:rPr lang="en-US" sz="2850" dirty="0" spc="2" kern="0">
+              <a:t> giữ</a:t>
+            </a:r>
+            <a:r>
+              <a:rPr lang="en-US" sz="2850" dirty="0" spc="0" kern="0">
                 <a:solidFill>
                   <a:srgbClr val="14161C"/>
                 </a:solidFill>
@@ -12347,18 +12347,7 @@
                 <a:ea typeface="Be Vietnam Pro SemiBold" pitchFamily="34" charset="-122"/>
                 <a:cs typeface="Be Vietnam Pro SemiBold" pitchFamily="34" charset="-120"/>
               </a:rPr>
-              <a:t> xử lý</a:t>
-            </a:r>
-            <a:r>
-              <a:rPr lang="en-US" sz="2850" dirty="0" spc="-6" kern="0">
-                <a:solidFill>
-                  <a:srgbClr val="14161C"/>
-                </a:solidFill>
-                <a:latin typeface="Be Vietnam Pro SemiBold" pitchFamily="34" charset="0"/>
-                <a:ea typeface="Be Vietnam Pro SemiBold" pitchFamily="34" charset="-122"/>
-                <a:cs typeface="Be Vietnam Pro SemiBold" pitchFamily="34" charset="-120"/>
-              </a:rPr>
-              <a:t> chết</a:t>
+              <a:t> việc</a:t>
             </a:r>
             <a:endParaRPr lang="en-US" sz="2850" dirty="0"/>
           </a:p>
